--- a/docs/lecture_slides/Week 10/2026/Week10_Lecture24_Slides_10_30_2026.pptx
+++ b/docs/lecture_slides/Week 10/2026/Week10_Lecture24_Slides_10_30_2026.pptx
@@ -8290,7 +8290,16 @@
                 </a:solidFill>
                 <a:latin typeface="Calibri" panose="020F0502020204030204" pitchFamily="34" charset="0"/>
               </a:rPr>
-              <a:t> = 0.00034;     α = 0.005</a:t>
+              <a:t> = 0.00034;     </a:t>
+            </a:r>
+            <a:r>
+              <a:rPr lang="el-GR" sz="2000" b="1">
+                <a:solidFill>
+                  <a:srgbClr val="000000"/>
+                </a:solidFill>
+                <a:latin typeface="Calibri" panose="020F0502020204030204" pitchFamily="34" charset="0"/>
+              </a:rPr>
+              <a:t>α = 0.05</a:t>
             </a:r>
             <a:endParaRPr lang="en-US" sz="2000" b="1">
               <a:solidFill>
@@ -8427,8 +8436,23 @@
                 </a:solidFill>
                 <a:latin typeface="Calibri" panose="020F0502020204030204" pitchFamily="34" charset="0"/>
               </a:rPr>
-              <a:t>(c)  What is the P-value?  What is the decision at α = 0.005?</a:t>
-            </a:r>
+              <a:t>(c)  What is the P-value?  What is the decision at </a:t>
+            </a:r>
+            <a:r>
+              <a:rPr lang="el-GR" b="1">
+                <a:solidFill>
+                  <a:srgbClr val="C00000"/>
+                </a:solidFill>
+                <a:latin typeface="Calibri" panose="020F0502020204030204" pitchFamily="34" charset="0"/>
+              </a:rPr>
+              <a:t>α = 0.05?</a:t>
+            </a:r>
+            <a:endParaRPr lang="en-US" b="1">
+              <a:solidFill>
+                <a:srgbClr val="C00000"/>
+              </a:solidFill>
+              <a:latin typeface="Calibri" panose="020F0502020204030204" pitchFamily="34" charset="0"/>
+            </a:endParaRPr>
           </a:p>
           <a:p>
             <a:pPr>
@@ -8443,7 +8467,7 @@
                 </a:solidFill>
                 <a:latin typeface="Calibri" panose="020F0502020204030204" pitchFamily="34" charset="0"/>
               </a:rPr>
-              <a:t>(d)  Why would we choose such a small α here?</a:t>
+              <a:t>(d)  The book uses α = 0.005.  Would the decision change?</a:t>
             </a:r>
           </a:p>
         </p:txBody>
@@ -8685,7 +8709,7 @@
                 </a:solidFill>
                 <a:latin typeface="Calibri" panose="020F0502020204030204" pitchFamily="34" charset="0"/>
               </a:rPr>
-              <a:t> true) = 1 − 0.9927 = 0.0073 ≥ 0.005:   do not reject H</a:t>
+              <a:t> true) = 1 − 0.9927 = 0.0073 &lt; 0.05:   reject H</a:t>
             </a:r>
             <a:r>
               <a:rPr lang="en-US" sz="2000" b="1" baseline="-25000">
@@ -8705,7 +8729,7 @@
                 </a:solidFill>
                 <a:latin typeface="Calibri" panose="020F0502020204030204" pitchFamily="34" charset="0"/>
               </a:rPr>
-              <a:t>(d)  Rejecting a true H</a:t>
+              <a:t>(d)  Yes:  0.0073 ≥ 0.005,  do not reject H</a:t>
             </a:r>
             <a:r>
               <a:rPr lang="en-US" sz="2000" b="1" baseline="-25000">
@@ -8723,7 +8747,7 @@
                 </a:solidFill>
                 <a:latin typeface="Calibri" panose="020F0502020204030204" pitchFamily="34" charset="0"/>
               </a:rPr>
-              <a:t> would wrongly blame phones for cancer, so we ask for strong evidence</a:t>
+              <a:t>.  Same data, opposite decision:  choose α first</a:t>
             </a:r>
           </a:p>
         </p:txBody>
